--- a/final_presentation_slides_he_updated.pptx
+++ b/final_presentation_slides_he_updated.pptx
@@ -13,7 +13,6 @@
     <p:sldId id="261" r:id="rId12"/>
     <p:sldId id="262" r:id="rId13"/>
     <p:sldId id="263" r:id="rId14"/>
-    <p:sldId id="264" r:id="rId15"/>
   </p:sldIdLst>
   <p:sldSz cx="12191695" cy="6858000" type="screen4x3"/>
   <p:notesSz cx="6858000" cy="9144000"/>
@@ -3106,57 +3105,14 @@
       <p:grpSpPr/>
       <p:sp>
         <p:nvSpPr>
-          <p:cNvPr id="2" name="Rectangle 1"/>
-          <p:cNvSpPr/>
+          <p:cNvPr id="2" name="TextBox 1"/>
+          <p:cNvSpPr txBox="1"/>
           <p:nvPr/>
         </p:nvSpPr>
         <p:spPr>
           <a:xfrm>
-            <a:off x="1371600" y="2011680"/>
-            <a:ext cx="9445752" cy="36576"/>
-          </a:xfrm>
-          <a:prstGeom prst="rect">
-            <a:avLst/>
-          </a:prstGeom>
-          <a:solidFill>
-            <a:srgbClr val="C5A880"/>
-          </a:solidFill>
-          <a:ln>
-            <a:noFill/>
-          </a:ln>
-        </p:spPr>
-        <p:style>
-          <a:lnRef idx="1">
-            <a:schemeClr val="accent1"/>
-          </a:lnRef>
-          <a:fillRef idx="3">
-            <a:schemeClr val="accent1"/>
-          </a:fillRef>
-          <a:effectRef idx="2">
-            <a:schemeClr val="accent1"/>
-          </a:effectRef>
-          <a:fontRef idx="minor">
-            <a:schemeClr val="lt1"/>
-          </a:fontRef>
-        </p:style>
-        <p:txBody>
-          <a:bodyPr rtlCol="0" anchor="ctr"/>
-          <a:lstStyle/>
-          <a:p>
-            <a:pPr algn="ctr"/>
-          </a:p>
-        </p:txBody>
-      </p:sp>
-      <p:sp>
-        <p:nvSpPr>
-          <p:cNvPr id="3" name="TextBox 2"/>
-          <p:cNvSpPr txBox="1"/>
-          <p:nvPr/>
-        </p:nvSpPr>
-        <p:spPr>
-          <a:xfrm>
-            <a:off x="1371600" y="2286000"/>
-            <a:ext cx="9445752" cy="1828800"/>
+            <a:off x="914400" y="365760"/>
+            <a:ext cx="10360152" cy="365760"/>
           </a:xfrm>
           <a:prstGeom prst="rect">
             <a:avLst/>
@@ -3164,29 +3120,13 @@
           <a:noFill/>
         </p:spPr>
         <p:txBody>
-          <a:bodyPr wrap="square">
+          <a:bodyPr wrap="none">
             <a:spAutoFit/>
           </a:bodyPr>
           <a:lstStyle/>
           <a:p>
             <a:pPr algn="r">
-              <a:defRPr sz="3600" b="1">
-                <a:solidFill>
-                  <a:srgbClr val="FFFFFF"/>
-                </a:solidFill>
-                <a:latin typeface="Arial"/>
-              </a:defRPr>
-            </a:pPr>
-            <a:r>
-              <a:t>גשר אל-קודס (JLM Legal Bridge)</a:t>
-            </a:r>
-          </a:p>
-          <a:p>
-            <a:pPr algn="r">
-              <a:spcBef>
-                <a:spcPts val="1200"/>
-              </a:spcBef>
-              <a:defRPr sz="2000">
+              <a:defRPr sz="1200" b="1">
                 <a:solidFill>
                   <a:srgbClr val="C5A880"/>
                 </a:solidFill>
@@ -3194,21 +3134,21 @@
               </a:defRPr>
             </a:pPr>
             <a:r>
-              <a:t>פלטפורמה דיגיטלית חכמה לניהול הקשר בין עורך הדין ללקוח, זימון תורים והערכת סיכויי תביעה מבוססת AI</a:t>
-            </a:r>
-          </a:p>
-        </p:txBody>
-      </p:sp>
-      <p:sp>
-        <p:nvSpPr>
-          <p:cNvPr id="4" name="TextBox 3"/>
+              <a:t>חלק 1: הגדרת הבעיה והשערות</a:t>
+            </a:r>
+          </a:p>
+        </p:txBody>
+      </p:sp>
+      <p:sp>
+        <p:nvSpPr>
+          <p:cNvPr id="3" name="TextBox 2"/>
           <p:cNvSpPr txBox="1"/>
           <p:nvPr/>
         </p:nvSpPr>
         <p:spPr>
           <a:xfrm>
-            <a:off x="1371600" y="4389120"/>
-            <a:ext cx="9445752" cy="1828800"/>
+            <a:off x="914400" y="731520"/>
+            <a:ext cx="10360152" cy="731520"/>
           </a:xfrm>
           <a:prstGeom prst="rect">
             <a:avLst/>
@@ -3216,16 +3156,100 @@
           <a:noFill/>
         </p:spPr>
         <p:txBody>
+          <a:bodyPr wrap="none">
+            <a:spAutoFit/>
+          </a:bodyPr>
+          <a:lstStyle/>
+          <a:p>
+            <a:pPr algn="r">
+              <a:defRPr sz="2800" b="1">
+                <a:solidFill>
+                  <a:srgbClr val="FFFFFF"/>
+                </a:solidFill>
+                <a:latin typeface="Arial"/>
+              </a:defRPr>
+            </a:pPr>
+            <a:r>
+              <a:t>הגדרת הבעיה והשערות היסוד (חלק 1)</a:t>
+            </a:r>
+          </a:p>
+        </p:txBody>
+      </p:sp>
+      <p:sp>
+        <p:nvSpPr>
+          <p:cNvPr id="4" name="TextBox 3"/>
+          <p:cNvSpPr txBox="1"/>
+          <p:nvPr/>
+        </p:nvSpPr>
+        <p:spPr>
+          <a:xfrm>
+            <a:off x="914400" y="1645920"/>
+            <a:ext cx="10360152" cy="4572000"/>
+          </a:xfrm>
+          <a:prstGeom prst="rect">
+            <a:avLst/>
+          </a:prstGeom>
+          <a:noFill/>
+        </p:spPr>
+        <p:txBody>
           <a:bodyPr wrap="square">
             <a:spAutoFit/>
           </a:bodyPr>
           <a:lstStyle/>
           <a:p>
             <a:pPr algn="r">
-              <a:spcBef>
-                <a:spcPts val="600"/>
-              </a:spcBef>
-              <a:defRPr sz="1400">
+              <a:spcAft>
+                <a:spcPts val="1000"/>
+              </a:spcAft>
+              <a:defRPr sz="1900" b="1">
+                <a:solidFill>
+                  <a:srgbClr val="FFFFFF"/>
+                </a:solidFill>
+                <a:latin typeface="Arial"/>
+              </a:defRPr>
+            </a:pPr>
+            <a:r>
+              <a:t>כותרת הפרויקט: גשר אל-קודס (JLM Legal Bridge)</a:t>
+            </a:r>
+          </a:p>
+          <a:p>
+            <a:pPr algn="r">
+              <a:spcAft>
+                <a:spcPts val="1000"/>
+              </a:spcAft>
+              <a:defRPr sz="1900" b="1">
+                <a:solidFill>
+                  <a:srgbClr val="FFFFFF"/>
+                </a:solidFill>
+                <a:latin typeface="Arial"/>
+              </a:defRPr>
+            </a:pPr>
+            <a:r>
+              <a:t>כותרת משנה: פלטפורמה דיגיטלית חכמה לניהול הקשר בין עורך הדין ללקוח, זימון תורים והערכת סיכויי תביעה מבוססת AI</a:t>
+            </a:r>
+          </a:p>
+          <a:p>
+            <a:pPr algn="r">
+              <a:spcAft>
+                <a:spcPts val="1000"/>
+              </a:spcAft>
+              <a:defRPr sz="1900" b="1">
+                <a:solidFill>
+                  <a:srgbClr val="FFFFFF"/>
+                </a:solidFill>
+                <a:latin typeface="Arial"/>
+              </a:defRPr>
+            </a:pPr>
+            <a:r>
+              <a:t>🔥 הבעיה האמיתית (Pain אמיתי):</a:t>
+            </a:r>
+          </a:p>
+          <a:p>
+            <a:pPr lvl="1" algn="r">
+              <a:spcAft>
+                <a:spcPts val="1000"/>
+              </a:spcAft>
+              <a:defRPr sz="1600">
                 <a:solidFill>
                   <a:srgbClr val="A0AEC0"/>
                 </a:solidFill>
@@ -3233,15 +3257,47 @@
               </a:defRPr>
             </a:pPr>
             <a:r>
-              <a:t>פרויקט גמר בניהול מוצר 2026</a:t>
+              <a:t>אצל עורך הדין: עומס שיחות והודעות לא רלוונטיות | בזבוז זמן יקר על לקוחות לא מתאימים | חזרה על אותן שאלות.</a:t>
+            </a:r>
+          </a:p>
+          <a:p>
+            <a:pPr lvl="1" algn="r">
+              <a:spcAft>
+                <a:spcPts val="1000"/>
+              </a:spcAft>
+              <a:defRPr sz="1600">
+                <a:solidFill>
+                  <a:srgbClr val="A0AEC0"/>
+                </a:solidFill>
+                <a:latin typeface="Arial"/>
+              </a:defRPr>
+            </a:pPr>
+            <a:r>
+              <a:t>אצל הלקוח: אינו יודע אם המקרה שלו מצדיק עורך דין | שפה משפטית מורכבת | זמני המתנה ארוכים ותשובות לא ברורות | פחד וחשש משיפוטיות.</a:t>
             </a:r>
           </a:p>
           <a:p>
             <a:pPr algn="r">
-              <a:spcBef>
-                <a:spcPts val="600"/>
-              </a:spcBef>
-              <a:defRPr sz="1400">
+              <a:spcAft>
+                <a:spcPts val="1000"/>
+              </a:spcAft>
+              <a:defRPr sz="1900" b="1">
+                <a:solidFill>
+                  <a:srgbClr val="FFFFFF"/>
+                </a:solidFill>
+                <a:latin typeface="Arial"/>
+              </a:defRPr>
+            </a:pPr>
+            <a:r>
+              <a:t>🎯 קהל היעד והצרכים:</a:t>
+            </a:r>
+          </a:p>
+          <a:p>
+            <a:pPr lvl="1" algn="r">
+              <a:spcAft>
+                <a:spcPts val="1000"/>
+              </a:spcAft>
+              <a:defRPr sz="1600">
                 <a:solidFill>
                   <a:srgbClr val="A0AEC0"/>
                 </a:solidFill>
@@ -3249,15 +3305,47 @@
               </a:defRPr>
             </a:pPr>
             <a:r>
-              <a:t>הקריה האקדמית אונו</a:t>
+              <a:t>הלקוח: צורך להבין את סיכוייו בקלות ובמהירות מרחוק ללא מבוכה (לשם כך פותח הצ'אט-בוט החכם).</a:t>
+            </a:r>
+          </a:p>
+          <a:p>
+            <a:pPr lvl="1" algn="r">
+              <a:spcAft>
+                <a:spcPts val="1000"/>
+              </a:spcAft>
+              <a:defRPr sz="1600">
+                <a:solidFill>
+                  <a:srgbClr val="A0AEC0"/>
+                </a:solidFill>
+                <a:latin typeface="Arial"/>
+              </a:defRPr>
+            </a:pPr>
+            <a:r>
+              <a:t>עורך הדין: צורך בכלי לניהול תיקים ותזמון תורים מובנה (CRM) לצורך ייעול הליכי הסינון והתקשורת המהירה.</a:t>
             </a:r>
           </a:p>
           <a:p>
             <a:pPr algn="r">
-              <a:spcBef>
-                <a:spcPts val="600"/>
-              </a:spcBef>
-              <a:defRPr sz="1400">
+              <a:spcAft>
+                <a:spcPts val="1000"/>
+              </a:spcAft>
+              <a:defRPr sz="1900" b="1">
+                <a:solidFill>
+                  <a:srgbClr val="FFFFFF"/>
+                </a:solidFill>
+                <a:latin typeface="Arial"/>
+              </a:defRPr>
+            </a:pPr>
+            <a:r>
+              <a:t>💡 הנחות היסוד הראשוניות (השערות ראשוניות):</a:t>
+            </a:r>
+          </a:p>
+          <a:p>
+            <a:pPr lvl="1" algn="r">
+              <a:spcAft>
+                <a:spcPts val="1000"/>
+              </a:spcAft>
+              <a:defRPr sz="1600">
                 <a:solidFill>
                   <a:srgbClr val="A0AEC0"/>
                 </a:solidFill>
@@ -3265,7 +3353,39 @@
               </a:defRPr>
             </a:pPr>
             <a:r>
-              <a:t>מגיש: עורך דין גשר אל-קודס</a:t>
+              <a:t>השערת ערך (Value): פדיון זכאות אנונימי ומהיר מרחוק יעלה את נכונות הלקוחות ליצירת קשר ב-40%.</a:t>
+            </a:r>
+          </a:p>
+          <a:p>
+            <a:pPr lvl="1" algn="r">
+              <a:spcAft>
+                <a:spcPts val="1000"/>
+              </a:spcAft>
+              <a:defRPr sz="1600">
+                <a:solidFill>
+                  <a:srgbClr val="A0AEC0"/>
+                </a:solidFill>
+                <a:latin typeface="Arial"/>
+              </a:defRPr>
+            </a:pPr>
+            <a:r>
+              <a:t>השערת שמישות (Usability): שימוש ברכיב קולי יקל על תיאור המקרה וימנע נטישת שאלונים במובייל.</a:t>
+            </a:r>
+          </a:p>
+          <a:p>
+            <a:pPr lvl="1" algn="r">
+              <a:spcAft>
+                <a:spcPts val="1000"/>
+              </a:spcAft>
+              <a:defRPr sz="1600">
+                <a:solidFill>
+                  <a:srgbClr val="A0AEC0"/>
+                </a:solidFill>
+                <a:latin typeface="Arial"/>
+              </a:defRPr>
+            </a:pPr>
+            <a:r>
+              <a:t>השערת קיום (Viability): מערכת ה-CRM המובנית וניהול התורים יחסכו כ-60% מזמן הסינון והתיאום המשרדי.</a:t>
             </a:r>
           </a:p>
         </p:txBody>
@@ -3327,7 +3447,7 @@
               </a:defRPr>
             </a:pPr>
             <a:r>
-              <a:t>חלק 1: הגדרת הבעיה והשערות</a:t>
+              <a:t>חלק 2: סיכום מחקר משתמשים ותובנות</a:t>
             </a:r>
           </a:p>
         </p:txBody>
@@ -3363,7 +3483,7 @@
               </a:defRPr>
             </a:pPr>
             <a:r>
-              <a:t>הגדרת הבעיה והצורך בשוק</a:t>
+              <a:t>פרסונות, JTBD וסיפורי משתמש (חלק 2)</a:t>
             </a:r>
           </a:p>
         </p:txBody>
@@ -3392,9 +3512,9 @@
           <a:p>
             <a:pPr algn="r">
               <a:spcAft>
-                <a:spcPts val="1200"/>
-              </a:spcAft>
-              <a:defRPr sz="2000" b="1">
+                <a:spcPts val="1000"/>
+              </a:spcAft>
+              <a:defRPr sz="1900" b="1">
                 <a:solidFill>
                   <a:srgbClr val="FFFFFF"/>
                 </a:solidFill>
@@ -3402,15 +3522,47 @@
               </a:defRPr>
             </a:pPr>
             <a:r>
-              <a:t>הבעיה המרכזית: חסמים קריטיים בנגישות לצדק ומימוש פיצויים רפואיים לנפגעי תאונות עבודה במזרח ירושלים.</a:t>
+              <a:t>👥 פרסונות המפתח (Personas):</a:t>
+            </a:r>
+          </a:p>
+          <a:p>
+            <a:pPr lvl="1" algn="r">
+              <a:spcAft>
+                <a:spcPts val="1000"/>
+              </a:spcAft>
+              <a:defRPr sz="1600">
+                <a:solidFill>
+                  <a:srgbClr val="A0AEC0"/>
+                </a:solidFill>
+                <a:latin typeface="Arial"/>
+              </a:defRPr>
+            </a:pPr>
+            <a:r>
+              <a:t>הלקוח עאדל (פועל בניין, 42): חרד מעלויות ומשיפוט של עורך דין, ומחפש הערכת סיכויים מיידית ועצמאית בנייד.</a:t>
+            </a:r>
+          </a:p>
+          <a:p>
+            <a:pPr lvl="1" algn="r">
+              <a:spcAft>
+                <a:spcPts val="1000"/>
+              </a:spcAft>
+              <a:defRPr sz="1600">
+                <a:solidFill>
+                  <a:srgbClr val="A0AEC0"/>
+                </a:solidFill>
+                <a:latin typeface="Arial"/>
+              </a:defRPr>
+            </a:pPr>
+            <a:r>
+              <a:t>עו"ד יוסף (שותף, 35): מתוסכל מביזבוז זמן על לקוחות לא מתאימים וחזרה על אותן שאלות שוב ושוב.</a:t>
             </a:r>
           </a:p>
           <a:p>
             <a:pPr algn="r">
               <a:spcAft>
-                <a:spcPts val="1200"/>
-              </a:spcAft>
-              <a:defRPr sz="2000" b="1">
+                <a:spcPts val="1000"/>
+              </a:spcAft>
+              <a:defRPr sz="1900" b="1">
                 <a:solidFill>
                   <a:srgbClr val="FFFFFF"/>
                 </a:solidFill>
@@ -3418,13 +3570,13 @@
               </a:defRPr>
             </a:pPr>
             <a:r>
-              <a:t>נקודות כאב בשוק:</a:t>
+              <a:t>🔥 נקודות כאב מרכזיות (Pain Points):</a:t>
             </a:r>
           </a:p>
           <a:p>
             <a:pPr lvl="1" algn="r">
               <a:spcAft>
-                <a:spcPts val="1200"/>
+                <a:spcPts val="1000"/>
               </a:spcAft>
               <a:defRPr sz="1600">
                 <a:solidFill>
@@ -3434,13 +3586,13 @@
               </a:defRPr>
             </a:pPr>
             <a:r>
-              <a:t>חשש כלכלי: פחד של עובדים מעלויות ייעוץ משפטי ראשוניות גבוהות.</a:t>
+              <a:t>אצל הלקוח: ייאוש ואובדן תקווה בשל אורך התהליכים הבורוקרטיים והמאמץ הרב הנדרש להצלחת התביעה.</a:t>
             </a:r>
           </a:p>
           <a:p>
             <a:pPr lvl="1" algn="r">
               <a:spcAft>
-                <a:spcPts val="1200"/>
+                <a:spcPts val="1000"/>
               </a:spcAft>
               <a:defRPr sz="1600">
                 <a:solidFill>
@@ -3450,13 +3602,29 @@
               </a:defRPr>
             </a:pPr>
             <a:r>
-              <a:t>מחסום שפה ותרבות: חוקים וטפסים של ביטוח לאומי כתובים בעברית משפטית מורכבת בלבד.</a:t>
+              <a:t>אצל עורך הדין: בזבוז שעות עבודה יקרות בסינון שיחות ידני עמוס וחזרה על אותן שאלות בסיסיות.</a:t>
+            </a:r>
+          </a:p>
+          <a:p>
+            <a:pPr algn="r">
+              <a:spcAft>
+                <a:spcPts val="1000"/>
+              </a:spcAft>
+              <a:defRPr sz="1900" b="1">
+                <a:solidFill>
+                  <a:srgbClr val="FFFFFF"/>
+                </a:solidFill>
+                <a:latin typeface="Arial"/>
+              </a:defRPr>
+            </a:pPr>
+            <a:r>
+              <a:t>🎯 ניתוח Jobs-To-Be-Done (JTBD):</a:t>
             </a:r>
           </a:p>
           <a:p>
             <a:pPr lvl="1" algn="r">
               <a:spcAft>
-                <a:spcPts val="1200"/>
+                <a:spcPts val="1000"/>
               </a:spcAft>
               <a:defRPr sz="1600">
                 <a:solidFill>
@@ -3466,13 +3634,13 @@
               </a:defRPr>
             </a:pPr>
             <a:r>
-              <a:t>חשש אישי ותעסוקתי: פחד של פועלים מפיטורין או פגיעה במקום העבודה עקב תביעה.</a:t>
+              <a:t>משימה 1 (הלקוח): בדיקת סיכויי התביעה הרפואית שלי בדיסקרטיות ובמהירות (הצלחה: קבלת תשובה ברורה "מצדיק/לא מצדיק" תוך 2 דקות).</a:t>
             </a:r>
           </a:p>
           <a:p>
             <a:pPr lvl="1" algn="r">
               <a:spcAft>
-                <a:spcPts val="1200"/>
+                <a:spcPts val="1000"/>
               </a:spcAft>
               <a:defRPr sz="1600">
                 <a:solidFill>
@@ -3482,15 +3650,15 @@
               </a:defRPr>
             </a:pPr>
             <a:r>
-              <a:t>סרבול ביורוקרטי: קושי משמעותי באיסוף והבנת מסמכים רפואיים ראשוניים לאחר פגיעה.</a:t>
+              <a:t>משימה 2 (עורך הדין): סינון לקוחות וקבלת תיק מסודר מראש (הצלחה: צמצום שיחות סרק ב-60% וקבלת פרטים ממוקדים).</a:t>
             </a:r>
           </a:p>
           <a:p>
             <a:pPr algn="r">
               <a:spcAft>
-                <a:spcPts val="1200"/>
-              </a:spcAft>
-              <a:defRPr sz="2000" b="1">
+                <a:spcPts val="1000"/>
+              </a:spcAft>
+              <a:defRPr sz="1900" b="1">
                 <a:solidFill>
                   <a:srgbClr val="FFFFFF"/>
                 </a:solidFill>
@@ -3498,13 +3666,13 @@
               </a:defRPr>
             </a:pPr>
             <a:r>
-              <a:t>השערות המפתח שהוגדרו בתחילת התהליך (Hypotheses):</a:t>
+              <a:t>📝 סיפורי משתמש (User Stories):</a:t>
             </a:r>
           </a:p>
           <a:p>
             <a:pPr lvl="1" algn="r">
               <a:spcAft>
-                <a:spcPts val="1200"/>
+                <a:spcPts val="1000"/>
               </a:spcAft>
               <a:defRPr sz="1600">
                 <a:solidFill>
@@ -3514,13 +3682,13 @@
               </a:defRPr>
             </a:pPr>
             <a:r>
-              <a:t>השערת ערך (Value): שאלון דיגיטלי אינטראקטיבי בשפת האם ובחינם יעלה את ההיענות ב-40%.</a:t>
+              <a:t>בתור זבון חרד שאינו בטוח אם המקרה שלו מוגדר כתאונת עבודה, כאשר אני מתבייש לפנות ישירות למשרד, אני רוצה להשתמש בצ'אט בוט אנונימי ונגיש בשפתי, כדי שאקבל אישור ראשוני לזכאותי ללא שיפוט.</a:t>
             </a:r>
           </a:p>
           <a:p>
             <a:pPr lvl="1" algn="r">
               <a:spcAft>
-                <a:spcPts val="1200"/>
+                <a:spcPts val="1000"/>
               </a:spcAft>
               <a:defRPr sz="1600">
                 <a:solidFill>
@@ -3530,23 +3698,7 @@
               </a:defRPr>
             </a:pPr>
             <a:r>
-              <a:t>השערת שמישות (Usability): ממשק קלט קולי (Voice-to-Text) בנייד ימנע נטישה בשל קשיי הקלדה.</a:t>
-            </a:r>
-          </a:p>
-          <a:p>
-            <a:pPr lvl="1" algn="r">
-              <a:spcAft>
-                <a:spcPts val="1200"/>
-              </a:spcAft>
-              <a:defRPr sz="1600">
-                <a:solidFill>
-                  <a:srgbClr val="A0AEC0"/>
-                </a:solidFill>
-                <a:latin typeface="Arial"/>
-              </a:defRPr>
-            </a:pPr>
-            <a:r>
-              <a:t>השערת קיום (Viability): מודל 'תשלום מבוסס הצלחה בלבד' (No Win = No Fee) יסיר לחץ פיננסי.</a:t>
+              <a:t>בתור משתמש רגיש המשתף פרטים רפואיים, כאשר אני מסיים את הבדיקה בצ'אט, אני רוצה לבחור באופן מפורש אם לשלוח את המידע או להשמיד אותו לצמיתות, כדי שארגיש שליטה מוחלטת במידע הפרטי שלי.</a:t>
             </a:r>
           </a:p>
         </p:txBody>
@@ -3608,7 +3760,7 @@
               </a:defRPr>
             </a:pPr>
             <a:r>
-              <a:t>חלק 2: סיכום מחקר משתמשים ותובנות</a:t>
+              <a:t>חלק 3: סיכום מחקר שוק</a:t>
             </a:r>
           </a:p>
         </p:txBody>
@@ -3644,7 +3796,7 @@
               </a:defRPr>
             </a:pPr>
             <a:r>
-              <a:t>פרסונות, JTBD וסיפורי משתמש</a:t>
+              <a:t>פתרונות קיימים בשוק, מגמות וניתוח SWOT (חלק 3)</a:t>
             </a:r>
           </a:p>
         </p:txBody>
@@ -3673,9 +3825,9 @@
           <a:p>
             <a:pPr algn="r">
               <a:spcAft>
-                <a:spcPts val="1200"/>
-              </a:spcAft>
-              <a:defRPr sz="2000" b="1">
+                <a:spcPts val="1000"/>
+              </a:spcAft>
+              <a:defRPr sz="1900" b="1">
                 <a:solidFill>
                   <a:srgbClr val="FFFFFF"/>
                 </a:solidFill>
@@ -3683,13 +3835,13 @@
               </a:defRPr>
             </a:pPr>
             <a:r>
-              <a:t>פרסונות המפתח שנחקרו במחקר השמישות:</a:t>
+              <a:t>🔍 פתרונות קיימים ופערים בשוק:</a:t>
             </a:r>
           </a:p>
           <a:p>
             <a:pPr lvl="1" algn="r">
               <a:spcAft>
-                <a:spcPts val="1200"/>
+                <a:spcPts val="1000"/>
               </a:spcAft>
               <a:defRPr sz="1600">
                 <a:solidFill>
@@ -3699,13 +3851,13 @@
               </a:defRPr>
             </a:pPr>
             <a:r>
-              <a:t>עאדל (פועל בניין פצוע, 42, עיסאוויה): אינו שולט בעברית, חושש מעלויות, פועל אך ורק מהטלפון הנייד.</a:t>
+              <a:t>טפסים דיגיטליים סטטיים: קשיחים, ארוכים, רק בעברית, אחוז נטישה מעל 70% בנייד ללא התאמה אישית.</a:t>
             </a:r>
           </a:p>
           <a:p>
             <a:pPr lvl="1" algn="r">
               <a:spcAft>
-                <a:spcPts val="1200"/>
+                <a:spcPts val="1000"/>
               </a:spcAft>
               <a:defRPr sz="1600">
                 <a:solidFill>
@@ -3715,15 +3867,31 @@
               </a:defRPr>
             </a:pPr>
             <a:r>
-              <a:t>עו"ד יוסף (שותף במשרד נזיקין, 35): מבזבז 60% מזמנו על סינון ידני של פניות שאין בהן עילה משפטית.</a:t>
+              <a:t>פנייה טלפונית והגעה פיזית: דורשת מאמץ וזמן נסיעה רב, חסם כניסה פסיכולוגי גבוה שגורם לייאוש מהתהליך.</a:t>
+            </a:r>
+          </a:p>
+          <a:p>
+            <a:pPr lvl="1" algn="r">
+              <a:spcAft>
+                <a:spcPts val="1000"/>
+              </a:spcAft>
+              <a:defRPr sz="1600">
+                <a:solidFill>
+                  <a:srgbClr val="A0AEC0"/>
+                </a:solidFill>
+                <a:latin typeface="Arial"/>
+              </a:defRPr>
+            </a:pPr>
+            <a:r>
+              <a:t>הפער בשוק: היעדר פלטפורמה אחודה המשלבת בדיקת זכאות דינמית (AI) יחד עם לוח בקרה מובנה של עורך דין לקיצור זמני תיאום וניהול תורים.</a:t>
             </a:r>
           </a:p>
           <a:p>
             <a:pPr algn="r">
               <a:spcAft>
-                <a:spcPts val="1200"/>
-              </a:spcAft>
-              <a:defRPr sz="2000" b="1">
+                <a:spcPts val="1000"/>
+              </a:spcAft>
+              <a:defRPr sz="1900" b="1">
                 <a:solidFill>
                   <a:srgbClr val="FFFFFF"/>
                 </a:solidFill>
@@ -3731,13 +3899,13 @@
               </a:defRPr>
             </a:pPr>
             <a:r>
-              <a:t>ניתוח Done Be To Jobs (JTBD) מרכזיים:</a:t>
+              <a:t>📈 מגמות טכנולוגיות מובילות:</a:t>
             </a:r>
           </a:p>
           <a:p>
             <a:pPr lvl="1" algn="r">
               <a:spcAft>
-                <a:spcPts val="1200"/>
+                <a:spcPts val="1000"/>
               </a:spcAft>
               <a:defRPr sz="1600">
                 <a:solidFill>
@@ -3747,13 +3915,13 @@
               </a:defRPr>
             </a:pPr>
             <a:r>
-              <a:t>משימה 1 (בדיקת זכאות): קבלת הערכת סיכויי תביעה בצורה אמינה וחינמית תוך 2 דקות מתוך הבית.</a:t>
+              <a:t>Conversational Legal Intake: מעבר של משרדים מובילים לצ'אט-בוטים אינטראקטיביים במובייל במקום טפסים.</a:t>
             </a:r>
           </a:p>
           <a:p>
             <a:pPr lvl="1" algn="r">
               <a:spcAft>
-                <a:spcPts val="1200"/>
+                <a:spcPts val="1000"/>
               </a:spcAft>
               <a:defRPr sz="1600">
                 <a:solidFill>
@@ -3763,15 +3931,31 @@
               </a:defRPr>
             </a:pPr>
             <a:r>
-              <a:t>משימה 2 (העברת פרטים): הקלטת גרסת התאונה בקולו בשפת האם ושליטה מוחלטת בפרטיות (השמדת המידע).</a:t>
+              <a:t>AI Eligibility Checks: שימוש באלגוריתמים לקביעת היתכנות התיק וסיכויי התביעה בזמן אמת.</a:t>
+            </a:r>
+          </a:p>
+          <a:p>
+            <a:pPr lvl="1" algn="r">
+              <a:spcAft>
+                <a:spcPts val="1000"/>
+              </a:spcAft>
+              <a:defRPr sz="1600">
+                <a:solidFill>
+                  <a:srgbClr val="A0AEC0"/>
+                </a:solidFill>
+                <a:latin typeface="Arial"/>
+              </a:defRPr>
+            </a:pPr>
+            <a:r>
+              <a:t>Unified Practice Management: חיבור ישיר ואינטגרטיבי בין מערכות הפנייה של המשתמשים ליומן המשרד ומערכות Outlook.</a:t>
             </a:r>
           </a:p>
           <a:p>
             <a:pPr algn="r">
               <a:spcAft>
-                <a:spcPts val="1200"/>
-              </a:spcAft>
-              <a:defRPr sz="2000" b="1">
+                <a:spcPts val="1000"/>
+              </a:spcAft>
+              <a:defRPr sz="1900" b="1">
                 <a:solidFill>
                   <a:srgbClr val="FFFFFF"/>
                 </a:solidFill>
@@ -3779,13 +3963,13 @@
               </a:defRPr>
             </a:pPr>
             <a:r>
-              <a:t>סיפור משתמש מרכזי (User Story):</a:t>
+              <a:t>📊 ניתוח SWOT של המוצר:</a:t>
             </a:r>
           </a:p>
           <a:p>
             <a:pPr lvl="1" algn="r">
               <a:spcAft>
-                <a:spcPts val="1200"/>
+                <a:spcPts val="1000"/>
               </a:spcAft>
               <a:defRPr sz="1600">
                 <a:solidFill>
@@ -3795,7 +3979,55 @@
               </a:defRPr>
             </a:pPr>
             <a:r>
-              <a:t>בתור פועל פצוע שאינו שולט בעברית, כאשר אני שוכב בבית לאחר תאונה, אני רוצה לענות על שאלון דינמי קצר בשפת האם שלי (ערבית), כדי שאדע מיידית אם יש לי סיכוי לקבל פיצוי ללא התחייבות כספית.</a:t>
+              <a:t>חוזקות (S): פתרון קול מובנה, דו-לשוניות מלאה, סינון לקוחות ללא עילה, וניהול תורים קל למשרד.</a:t>
+            </a:r>
+          </a:p>
+          <a:p>
+            <a:pPr lvl="1" algn="r">
+              <a:spcAft>
+                <a:spcPts val="1000"/>
+              </a:spcAft>
+              <a:defRPr sz="1600">
+                <a:solidFill>
+                  <a:srgbClr val="A0AEC0"/>
+                </a:solidFill>
+                <a:latin typeface="Arial"/>
+              </a:defRPr>
+            </a:pPr>
+            <a:r>
+              <a:t>חולשות (W): תלות בחיבור אינטרנט של המשתמש ובאמינות הנייד.</a:t>
+            </a:r>
+          </a:p>
+          <a:p>
+            <a:pPr lvl="1" algn="r">
+              <a:spcAft>
+                <a:spcPts val="1000"/>
+              </a:spcAft>
+              <a:defRPr sz="1600">
+                <a:solidFill>
+                  <a:srgbClr val="A0AEC0"/>
+                </a:solidFill>
+                <a:latin typeface="Arial"/>
+              </a:defRPr>
+            </a:pPr>
+            <a:r>
+              <a:t>הזדמנויות (O): פיתוח ערוץ וואטסאפ בוט (WhatsApp Integration) להקלת הגישה עוד יותר.</a:t>
+            </a:r>
+          </a:p>
+          <a:p>
+            <a:pPr lvl="1" algn="r">
+              <a:spcAft>
+                <a:spcPts val="1000"/>
+              </a:spcAft>
+              <a:defRPr sz="1600">
+                <a:solidFill>
+                  <a:srgbClr val="A0AEC0"/>
+                </a:solidFill>
+                <a:latin typeface="Arial"/>
+              </a:defRPr>
+            </a:pPr>
+            <a:r>
+              <a:t>איומים (T): כניסת מתחרים גדולים לשוק המקומי או התנגדות של משרדים שמרניים לטכנולוגיה.</a:t>
             </a:r>
           </a:p>
         </p:txBody>
@@ -3857,7 +4089,7 @@
               </a:defRPr>
             </a:pPr>
             <a:r>
-              <a:t>חלק 3: סיכום מחקר שוק ומגמות</a:t>
+              <a:t>חלק 4: חזון המוצר והצעת הערך</a:t>
             </a:r>
           </a:p>
         </p:txBody>
@@ -3893,7 +4125,7 @@
               </a:defRPr>
             </a:pPr>
             <a:r>
-              <a:t>פתרונות קיימים בשוק, מגמות וניתוח SWOT</a:t>
+              <a:t>חזון, הצעת ערך ייחודית ואימות השערות (חלק 4)</a:t>
             </a:r>
           </a:p>
         </p:txBody>
@@ -3922,9 +4154,9 @@
           <a:p>
             <a:pPr algn="r">
               <a:spcAft>
-                <a:spcPts val="1200"/>
-              </a:spcAft>
-              <a:defRPr sz="2000" b="1">
+                <a:spcPts val="1000"/>
+              </a:spcAft>
+              <a:defRPr sz="1900" b="1">
                 <a:solidFill>
                   <a:srgbClr val="FFFFFF"/>
                 </a:solidFill>
@@ -3932,13 +4164,29 @@
               </a:defRPr>
             </a:pPr>
             <a:r>
-              <a:t>פתרונות קיימים בשוק ופערים מרכזיים:</a:t>
+              <a:t>🎯 חזון המוצר: להסיר חסמי פחד וסרבול בירוקרטי, ולהוות את הגשר הדיגיטלי הנגיש והאמין ביותר שמחבר בין נפגעי גוף לקבלת פיצוי הוגן ומהיר.</a:t>
+            </a:r>
+          </a:p>
+          <a:p>
+            <a:pPr algn="r">
+              <a:spcAft>
+                <a:spcPts val="1000"/>
+              </a:spcAft>
+              <a:defRPr sz="1900" b="1">
+                <a:solidFill>
+                  <a:srgbClr val="FFFFFF"/>
+                </a:solidFill>
+                <a:latin typeface="Arial"/>
+              </a:defRPr>
+            </a:pPr>
+            <a:r>
+              <a:t>💡 הצעת הערך הייחודית (Unique Value Proposition):</a:t>
             </a:r>
           </a:p>
           <a:p>
             <a:pPr lvl="1" algn="r">
               <a:spcAft>
-                <a:spcPts val="1200"/>
+                <a:spcPts val="1000"/>
               </a:spcAft>
               <a:defRPr sz="1600">
                 <a:solidFill>
@@ -3948,13 +4196,29 @@
               </a:defRPr>
             </a:pPr>
             <a:r>
-              <a:t>טפסים סטטיים באתרים: קרים, ארוכים, בעברית בלבד, שיעור נטישה מעל 70% במובייל.</a:t>
+              <a:t>הערכת זכאות משפטית ותיאום תור מיידי מול עורך דין תוך 2 דקות בלבד, בשפתך ובצורה פשוטה, ללא עלות מראש וללא כל התחייבות – עם שליטה מלאה ופרטיות מוחלטת במידע האישי שלך.</a:t>
+            </a:r>
+          </a:p>
+          <a:p>
+            <a:pPr algn="r">
+              <a:spcAft>
+                <a:spcPts val="1000"/>
+              </a:spcAft>
+              <a:defRPr sz="1900" b="1">
+                <a:solidFill>
+                  <a:srgbClr val="FFFFFF"/>
+                </a:solidFill>
+                <a:latin typeface="Arial"/>
+              </a:defRPr>
+            </a:pPr>
+            <a:r>
+              <a:t>⚔️ מחקר מתחרים ישירים (נקודות החוזק שלנו):</a:t>
             </a:r>
           </a:p>
           <a:p>
             <a:pPr lvl="1" algn="r">
               <a:spcAft>
-                <a:spcPts val="1200"/>
+                <a:spcPts val="1000"/>
               </a:spcAft>
               <a:defRPr sz="1600">
                 <a:solidFill>
@@ -3964,13 +4228,13 @@
               </a:defRPr>
             </a:pPr>
             <a:r>
-              <a:t>פנייה והגעה פיזית למשרד: חסם פסיכולוגי גבוה, הוצאות נסיעה וצורך בתיאום פגישה מראש.</a:t>
+              <a:t>דו-לשוניות מלאה ודינמית: (מתחרים: טפסים נוקשים בעברית בלבד).</a:t>
             </a:r>
           </a:p>
           <a:p>
             <a:pPr lvl="1" algn="r">
               <a:spcAft>
-                <a:spcPts val="1200"/>
+                <a:spcPts val="1000"/>
               </a:spcAft>
               <a:defRPr sz="1600">
                 <a:solidFill>
@@ -3980,15 +4244,31 @@
               </a:defRPr>
             </a:pPr>
             <a:r>
-              <a:t>הפער בשוק: היעדר כלי דינמי, מותאם מובייל (Mobile-First), דו-לשוני עם תמיכה מובנית בהקלטה קולית.</a:t>
+              <a:t>ממשק קלט קולי מובנה ורציף: (מתחרים: לא קיים, דורש הקלדה ארוכה).</a:t>
+            </a:r>
+          </a:p>
+          <a:p>
+            <a:pPr lvl="1" algn="r">
+              <a:spcAft>
+                <a:spcPts val="1000"/>
+              </a:spcAft>
+              <a:defRPr sz="1600">
+                <a:solidFill>
+                  <a:srgbClr val="A0AEC0"/>
+                </a:solidFill>
+                <a:latin typeface="Arial"/>
+              </a:defRPr>
+            </a:pPr>
+            <a:r>
+              <a:t>אינטגרציה לניהול תורים ו-CRM: (מתחרים: טפסים סטטיים הדורשים חזרה טלפונית ידנית ממושכת).</a:t>
             </a:r>
           </a:p>
           <a:p>
             <a:pPr algn="r">
               <a:spcAft>
-                <a:spcPts val="1200"/>
-              </a:spcAft>
-              <a:defRPr sz="2000" b="1">
+                <a:spcPts val="1000"/>
+              </a:spcAft>
+              <a:defRPr sz="1900" b="1">
                 <a:solidFill>
                   <a:srgbClr val="FFFFFF"/>
                 </a:solidFill>
@@ -3996,13 +4276,13 @@
               </a:defRPr>
             </a:pPr>
             <a:r>
-              <a:t>מגמות מובילות בעידן ה-LegalTech וה-AI:</a:t>
+              <a:t>✔ תיקוף השערות במחקר:</a:t>
             </a:r>
           </a:p>
           <a:p>
             <a:pPr lvl="1" algn="r">
               <a:spcAft>
-                <a:spcPts val="1200"/>
+                <a:spcPts val="1000"/>
               </a:spcAft>
               <a:defRPr sz="1600">
                 <a:solidFill>
@@ -4012,103 +4292,7 @@
               </a:defRPr>
             </a:pPr>
             <a:r>
-              <a:t>Conversational Intake: מעבר של משרדים מובילים בעולם מטפסים קשיחים לצ'אט-בוטים אינטראקטיביים.</a:t>
-            </a:r>
-          </a:p>
-          <a:p>
-            <a:pPr lvl="1" algn="r">
-              <a:spcAft>
-                <a:spcPts val="1200"/>
-              </a:spcAft>
-              <a:defRPr sz="1600">
-                <a:solidFill>
-                  <a:srgbClr val="A0AEC0"/>
-                </a:solidFill>
-                <a:latin typeface="Arial"/>
-              </a:defRPr>
-            </a:pPr>
-            <a:r>
-              <a:t>Voice User Interfaces: עליית השימוש בממשקי קול באוכלוסיות שמתקשות בהקלדה בנייד.</a:t>
-            </a:r>
-          </a:p>
-          <a:p>
-            <a:pPr algn="r">
-              <a:spcAft>
-                <a:spcPts val="1200"/>
-              </a:spcAft>
-              <a:defRPr sz="2000" b="1">
-                <a:solidFill>
-                  <a:srgbClr val="FFFFFF"/>
-                </a:solidFill>
-                <a:latin typeface="Arial"/>
-              </a:defRPr>
-            </a:pPr>
-            <a:r>
-              <a:t>ניתוח SWOT של המוצר:</a:t>
-            </a:r>
-          </a:p>
-          <a:p>
-            <a:pPr lvl="1" algn="r">
-              <a:spcAft>
-                <a:spcPts val="1200"/>
-              </a:spcAft>
-              <a:defRPr sz="1600">
-                <a:solidFill>
-                  <a:srgbClr val="A0AEC0"/>
-                </a:solidFill>
-                <a:latin typeface="Arial"/>
-              </a:defRPr>
-            </a:pPr>
-            <a:r>
-              <a:t>חוזקות (S): לוקליזציה דו-לשונית מלאה, המרת דיבור לטקסט מובנית, ניתוב שאלות חכם ומותאם תרחיש.</a:t>
-            </a:r>
-          </a:p>
-          <a:p>
-            <a:pPr lvl="1" algn="r">
-              <a:spcAft>
-                <a:spcPts val="1200"/>
-              </a:spcAft>
-              <a:defRPr sz="1600">
-                <a:solidFill>
-                  <a:srgbClr val="A0AEC0"/>
-                </a:solidFill>
-                <a:latin typeface="Arial"/>
-              </a:defRPr>
-            </a:pPr>
-            <a:r>
-              <a:t>חולשות (W): תלות של המשתמש בחיבור אינטרנט יציב של הטלפון הנייד.</a:t>
-            </a:r>
-          </a:p>
-          <a:p>
-            <a:pPr lvl="1" algn="r">
-              <a:spcAft>
-                <a:spcPts val="1200"/>
-              </a:spcAft>
-              <a:defRPr sz="1600">
-                <a:solidFill>
-                  <a:srgbClr val="A0AEC0"/>
-                </a:solidFill>
-                <a:latin typeface="Arial"/>
-              </a:defRPr>
-            </a:pPr>
-            <a:r>
-              <a:t>הזדמנויות (O): שילוב עתידי של WhatsApp Business API להנגשה מקסימלית ללא צורך בכניסה לאתר.</a:t>
-            </a:r>
-          </a:p>
-          <a:p>
-            <a:pPr lvl="1" algn="r">
-              <a:spcAft>
-                <a:spcPts val="1200"/>
-              </a:spcAft>
-              <a:defRPr sz="1600">
-                <a:solidFill>
-                  <a:srgbClr val="A0AEC0"/>
-                </a:solidFill>
-                <a:latin typeface="Arial"/>
-              </a:defRPr>
-            </a:pPr>
-            <a:r>
-              <a:t>איומים (T): העתקה על ידי חברות LegalTech גדולות בשוק הישראלי או שינויי רגולציה.</a:t>
+              <a:t>השערת דחיית בקשת הטלפון לסוף התהליך אומתה כמגבירה אמון; השערת ההקלטה הקולית אומתה כמפחיתה מאמץ הקלדה רפואית.</a:t>
             </a:r>
           </a:p>
         </p:txBody>
@@ -4170,7 +4354,7 @@
               </a:defRPr>
             </a:pPr>
             <a:r>
-              <a:t>חלק 4: חזון המוצר והצעת הערך</a:t>
+              <a:t>חלק 5: קנבס מודל עסקי - שלבים 1-4 בלבד</a:t>
             </a:r>
           </a:p>
         </p:txBody>
@@ -4206,7 +4390,7 @@
               </a:defRPr>
             </a:pPr>
             <a:r>
-              <a:t>חזון, הצעת ערך ייחודית ואימות השערות</a:t>
+              <a:t>קנבס מודל עסקי (חלק 5)</a:t>
             </a:r>
           </a:p>
         </p:txBody>
@@ -4235,9 +4419,9 @@
           <a:p>
             <a:pPr algn="r">
               <a:spcAft>
-                <a:spcPts val="1200"/>
-              </a:spcAft>
-              <a:defRPr sz="2000" b="1">
+                <a:spcPts val="1000"/>
+              </a:spcAft>
+              <a:defRPr sz="1900" b="1">
                 <a:solidFill>
                   <a:srgbClr val="FFFFFF"/>
                 </a:solidFill>
@@ -4245,15 +4429,47 @@
               </a:defRPr>
             </a:pPr>
             <a:r>
-              <a:t>חזון המוצר: להסיר חסמי שפה ופחד כלכלי, ולהוות את הגשר הדיגיטלי הנגיש והאמין ביותר שמחבר בין נפגעי גוף במזרח ירושלים לבין קבלת פיצוי הוגן.</a:t>
+              <a:t>.1 פלחי לקוחות (Customer Segments):</a:t>
+            </a:r>
+          </a:p>
+          <a:p>
+            <a:pPr lvl="1" algn="r">
+              <a:spcAft>
+                <a:spcPts val="1000"/>
+              </a:spcAft>
+              <a:defRPr sz="1600">
+                <a:solidFill>
+                  <a:srgbClr val="A0AEC0"/>
+                </a:solidFill>
+                <a:latin typeface="Arial"/>
+              </a:defRPr>
+            </a:pPr>
+            <a:r>
+              <a:t>לקוחות ונפגעי תאונות עבודה ודרכים המחפשים בדיקת זכאות עצמאית ומהירה ותקשורת קלה מול עורך דין.</a:t>
+            </a:r>
+          </a:p>
+          <a:p>
+            <a:pPr lvl="1" algn="r">
+              <a:spcAft>
+                <a:spcPts val="1000"/>
+              </a:spcAft>
+              <a:defRPr sz="1600">
+                <a:solidFill>
+                  <a:srgbClr val="A0AEC0"/>
+                </a:solidFill>
+                <a:latin typeface="Arial"/>
+              </a:defRPr>
+            </a:pPr>
+            <a:r>
+              <a:t>משרדי עורכי דין לנזקי גוף המחפשים פניות מסוננות, מאומתות ומאורגנות מראש ללא שיחות סרק.</a:t>
             </a:r>
           </a:p>
           <a:p>
             <a:pPr algn="r">
               <a:spcAft>
-                <a:spcPts val="1200"/>
-              </a:spcAft>
-              <a:defRPr sz="2000" b="1">
+                <a:spcPts val="1000"/>
+              </a:spcAft>
+              <a:defRPr sz="1900" b="1">
                 <a:solidFill>
                   <a:srgbClr val="FFFFFF"/>
                 </a:solidFill>
@@ -4261,13 +4477,13 @@
               </a:defRPr>
             </a:pPr>
             <a:r>
-              <a:t>הצעת הערך הייחודית (Unique Value Proposition):</a:t>
+              <a:t>.2 הצעת ערך (Value Propositions):</a:t>
             </a:r>
           </a:p>
           <a:p>
             <a:pPr lvl="1" algn="r">
               <a:spcAft>
-                <a:spcPts val="1200"/>
+                <a:spcPts val="1000"/>
               </a:spcAft>
               <a:defRPr sz="1600">
                 <a:solidFill>
@@ -4277,15 +4493,31 @@
               </a:defRPr>
             </a:pPr>
             <a:r>
-              <a:t>הערכת זכאות משפטית ורפואית תוך 2 דקות בלבד, בשפת האם שלך, ללא עלות מראש וללא כל התחייבות – עם שליטה מלאה בפרטיות המידע שלך.</a:t>
+              <a:t>ללקוח: בדיקה מהירה, אנונימית, ללא סיכון פיננסי, תזמון תור מיידי ושליטה מלאה בנתונים האישיים.</a:t>
+            </a:r>
+          </a:p>
+          <a:p>
+            <a:pPr lvl="1" algn="r">
+              <a:spcAft>
+                <a:spcPts val="1000"/>
+              </a:spcAft>
+              <a:defRPr sz="1600">
+                <a:solidFill>
+                  <a:srgbClr val="A0AEC0"/>
+                </a:solidFill>
+                <a:latin typeface="Arial"/>
+              </a:defRPr>
+            </a:pPr>
+            <a:r>
+              <a:t>לעורך הדין: קבלת תיק מסווג ומסונן היטב מראש, יומן פגישות מאורגן וחיסכון משמעותי בזמן הסינון.</a:t>
             </a:r>
           </a:p>
           <a:p>
             <a:pPr algn="r">
               <a:spcAft>
-                <a:spcPts val="1200"/>
-              </a:spcAft>
-              <a:defRPr sz="2000" b="1">
+                <a:spcPts val="1000"/>
+              </a:spcAft>
+              <a:defRPr sz="1900" b="1">
                 <a:solidFill>
                   <a:srgbClr val="FFFFFF"/>
                 </a:solidFill>
@@ -4293,13 +4525,13 @@
               </a:defRPr>
             </a:pPr>
             <a:r>
-              <a:t>אימות השערות המחקר בשטח (Validation):</a:t>
+              <a:t>.3 ערוצים (Channels):</a:t>
             </a:r>
           </a:p>
           <a:p>
             <a:pPr lvl="1" algn="r">
               <a:spcAft>
-                <a:spcPts val="1200"/>
+                <a:spcPts val="1000"/>
               </a:spcAft>
               <a:defRPr sz="1600">
                 <a:solidFill>
@@ -4309,13 +4541,29 @@
               </a:defRPr>
             </a:pPr>
             <a:r>
-              <a:t>השערה 1 (מיקום פרטי קשר בסוף): אומתה. העברת שאלת הטלפון לסוף התהליך העלתה את אמון המשתמשים.</a:t>
+              <a:t>פרסום ממומן ואורגני במנועי חיפוש (SEO/SEM), קבוצות פייסבוק מקצועיות וקהילות עובדים.</a:t>
+            </a:r>
+          </a:p>
+          <a:p>
+            <a:pPr algn="r">
+              <a:spcAft>
+                <a:spcPts val="1000"/>
+              </a:spcAft>
+              <a:defRPr sz="1900" b="1">
+                <a:solidFill>
+                  <a:srgbClr val="FFFFFF"/>
+                </a:solidFill>
+                <a:latin typeface="Arial"/>
+              </a:defRPr>
+            </a:pPr>
+            <a:r>
+              <a:t>.4 קשרי לקוחות (Customer Relationships):</a:t>
             </a:r>
           </a:p>
           <a:p>
             <a:pPr lvl="1" algn="r">
               <a:spcAft>
-                <a:spcPts val="1200"/>
+                <a:spcPts val="1000"/>
               </a:spcAft>
               <a:defRPr sz="1600">
                 <a:solidFill>
@@ -4325,7 +4573,7 @@
               </a:defRPr>
             </a:pPr>
             <a:r>
-              <a:t>השערה 2 (העדפת קול על הקלדה): אומתה. פועלים ציינו כי הקלטת נסיבות התאונה בקולם חסכה מאמץ רב.</a:t>
+              <a:t>קשר מבוסס אמון ודיסקרטיות מלאה (אפשרות להשמדת נתונים בלחיצה), ליווי בצ'אט קשוב ללא לחץ משרדי.</a:t>
             </a:r>
           </a:p>
         </p:txBody>
@@ -4387,7 +4635,7 @@
               </a:defRPr>
             </a:pPr>
             <a:r>
-              <a:t>חלק 5: קנבס מודל עסקי - שלבים 1-4 בלבד</a:t>
+              <a:t>חלק 6: אפיון ותעדוף פיצ'רים</a:t>
             </a:r>
           </a:p>
         </p:txBody>
@@ -4423,288 +4671,7 @@
               </a:defRPr>
             </a:pPr>
             <a:r>
-              <a:t>ניתוח ארבעת השלבים המובילים ב-Business Model Canvas</a:t>
-            </a:r>
-          </a:p>
-        </p:txBody>
-      </p:sp>
-      <p:sp>
-        <p:nvSpPr>
-          <p:cNvPr id="4" name="TextBox 3"/>
-          <p:cNvSpPr txBox="1"/>
-          <p:nvPr/>
-        </p:nvSpPr>
-        <p:spPr>
-          <a:xfrm>
-            <a:off x="914400" y="1645920"/>
-            <a:ext cx="10360152" cy="4572000"/>
-          </a:xfrm>
-          <a:prstGeom prst="rect">
-            <a:avLst/>
-          </a:prstGeom>
-          <a:noFill/>
-        </p:spPr>
-        <p:txBody>
-          <a:bodyPr wrap="square">
-            <a:spAutoFit/>
-          </a:bodyPr>
-          <a:lstStyle/>
-          <a:p>
-            <a:pPr algn="r">
-              <a:spcAft>
-                <a:spcPts val="1200"/>
-              </a:spcAft>
-              <a:defRPr sz="2000" b="1">
-                <a:solidFill>
-                  <a:srgbClr val="FFFFFF"/>
-                </a:solidFill>
-                <a:latin typeface="Arial"/>
-              </a:defRPr>
-            </a:pPr>
-            <a:r>
-              <a:t>1. פלחי לקוחות (Customer Segments):</a:t>
-            </a:r>
-          </a:p>
-          <a:p>
-            <a:pPr lvl="1" algn="r">
-              <a:spcAft>
-                <a:spcPts val="1200"/>
-              </a:spcAft>
-              <a:defRPr sz="1600">
-                <a:solidFill>
-                  <a:srgbClr val="A0AEC0"/>
-                </a:solidFill>
-                <a:latin typeface="Arial"/>
-              </a:defRPr>
-            </a:pPr>
-            <a:r>
-              <a:t>נפגעי תאונות עבודה ודרכים במזרח ירושלים דוברי ערבית/עברית.</a:t>
-            </a:r>
-          </a:p>
-          <a:p>
-            <a:pPr lvl="1" algn="r">
-              <a:spcAft>
-                <a:spcPts val="1200"/>
-              </a:spcAft>
-              <a:defRPr sz="1600">
-                <a:solidFill>
-                  <a:srgbClr val="A0AEC0"/>
-                </a:solidFill>
-                <a:latin typeface="Arial"/>
-              </a:defRPr>
-            </a:pPr>
-            <a:r>
-              <a:t>משרדי עורכי דין לנזקי גוף בירושלים המחפשים לקוחות מסוננים ואיכותיים מראש.</a:t>
-            </a:r>
-          </a:p>
-          <a:p>
-            <a:pPr algn="r">
-              <a:spcAft>
-                <a:spcPts val="1200"/>
-              </a:spcAft>
-              <a:defRPr sz="2000" b="1">
-                <a:solidFill>
-                  <a:srgbClr val="FFFFFF"/>
-                </a:solidFill>
-                <a:latin typeface="Arial"/>
-              </a:defRPr>
-            </a:pPr>
-            <a:r>
-              <a:t>2. הצעת ערך (Value Propositions):</a:t>
-            </a:r>
-          </a:p>
-          <a:p>
-            <a:pPr lvl="1" algn="r">
-              <a:spcAft>
-                <a:spcPts val="1200"/>
-              </a:spcAft>
-              <a:defRPr sz="1600">
-                <a:solidFill>
-                  <a:srgbClr val="A0AEC0"/>
-                </a:solidFill>
-                <a:latin typeface="Arial"/>
-              </a:defRPr>
-            </a:pPr>
-            <a:r>
-              <a:t>למשתמש: בדיקה מהירה, אנונימית, בשפת האם ובממשק קולי ללא סיכון פיננסי.</a:t>
-            </a:r>
-          </a:p>
-          <a:p>
-            <a:pPr lvl="1" algn="r">
-              <a:spcAft>
-                <a:spcPts val="1200"/>
-              </a:spcAft>
-              <a:defRPr sz="1600">
-                <a:solidFill>
-                  <a:srgbClr val="A0AEC0"/>
-                </a:solidFill>
-                <a:latin typeface="Arial"/>
-              </a:defRPr>
-            </a:pPr>
-            <a:r>
-              <a:t>למשרד עורכי דין: קבלת תיק לקוח מסווג, מאורגן ומסונן היטב ללא עבודת איסוף ידנית.</a:t>
-            </a:r>
-          </a:p>
-          <a:p>
-            <a:pPr algn="r">
-              <a:spcAft>
-                <a:spcPts val="1200"/>
-              </a:spcAft>
-              <a:defRPr sz="2000" b="1">
-                <a:solidFill>
-                  <a:srgbClr val="FFFFFF"/>
-                </a:solidFill>
-                <a:latin typeface="Arial"/>
-              </a:defRPr>
-            </a:pPr>
-            <a:r>
-              <a:t>3. ערוצים (Channels):</a:t>
-            </a:r>
-          </a:p>
-          <a:p>
-            <a:pPr lvl="1" algn="r">
-              <a:spcAft>
-                <a:spcPts val="1200"/>
-              </a:spcAft>
-              <a:defRPr sz="1600">
-                <a:solidFill>
-                  <a:srgbClr val="A0AEC0"/>
-                </a:solidFill>
-                <a:latin typeface="Arial"/>
-              </a:defRPr>
-            </a:pPr>
-            <a:r>
-              <a:t>פרסום ממומן ואורגני במנועי חיפוש (SEO/SEM) בערבית, פורומים וקבוצות פייסבוק של עובדים בירושלים.</a:t>
-            </a:r>
-          </a:p>
-          <a:p>
-            <a:pPr algn="r">
-              <a:spcAft>
-                <a:spcPts val="1200"/>
-              </a:spcAft>
-              <a:defRPr sz="2000" b="1">
-                <a:solidFill>
-                  <a:srgbClr val="FFFFFF"/>
-                </a:solidFill>
-                <a:latin typeface="Arial"/>
-              </a:defRPr>
-            </a:pPr>
-            <a:r>
-              <a:t>4. קשרי לקוחות (Customer Relationships):</a:t>
-            </a:r>
-          </a:p>
-          <a:p>
-            <a:pPr lvl="1" algn="r">
-              <a:spcAft>
-                <a:spcPts val="1200"/>
-              </a:spcAft>
-              <a:defRPr sz="1600">
-                <a:solidFill>
-                  <a:srgbClr val="A0AEC0"/>
-                </a:solidFill>
-                <a:latin typeface="Arial"/>
-              </a:defRPr>
-            </a:pPr>
-            <a:r>
-              <a:t>קשר מבוסס אמון ודיסקרטיות (אפשרות להשמדת נתונים מיידית), ליווי בצ'אט קשוב ללא לחץ.</a:t>
-            </a:r>
-          </a:p>
-        </p:txBody>
-      </p:sp>
-    </p:spTree>
-  </p:cSld>
-  <p:clrMapOvr>
-    <a:masterClrMapping/>
-  </p:clrMapOvr>
-</p:sld>
-</file>
-
-<file path=ppt/slides/slide7.xml><?xml version="1.0" encoding="utf-8"?>
-<p:sld xmlns:a="http://schemas.openxmlformats.org/drawingml/2006/main" xmlns:p="http://schemas.openxmlformats.org/presentationml/2006/main" xmlns:r="http://schemas.openxmlformats.org/officeDocument/2006/relationships">
-  <p:cSld>
-    <p:bg>
-      <p:bgPr>
-        <a:solidFill>
-          <a:srgbClr val="0D0F17"/>
-        </a:solidFill>
-        <a:effectLst/>
-      </p:bgPr>
-    </p:bg>
-    <p:spTree>
-      <p:nvGrpSpPr>
-        <p:cNvPr id="1" name=""/>
-        <p:cNvGrpSpPr/>
-        <p:nvPr/>
-      </p:nvGrpSpPr>
-      <p:grpSpPr/>
-      <p:sp>
-        <p:nvSpPr>
-          <p:cNvPr id="2" name="TextBox 1"/>
-          <p:cNvSpPr txBox="1"/>
-          <p:nvPr/>
-        </p:nvSpPr>
-        <p:spPr>
-          <a:xfrm>
-            <a:off x="914400" y="365760"/>
-            <a:ext cx="10360152" cy="365760"/>
-          </a:xfrm>
-          <a:prstGeom prst="rect">
-            <a:avLst/>
-          </a:prstGeom>
-          <a:noFill/>
-        </p:spPr>
-        <p:txBody>
-          <a:bodyPr wrap="none">
-            <a:spAutoFit/>
-          </a:bodyPr>
-          <a:lstStyle/>
-          <a:p>
-            <a:pPr algn="r">
-              <a:defRPr sz="1200" b="1">
-                <a:solidFill>
-                  <a:srgbClr val="C5A880"/>
-                </a:solidFill>
-                <a:latin typeface="Arial"/>
-              </a:defRPr>
-            </a:pPr>
-            <a:r>
-              <a:t>חלק 6: אפיון ותעדוף פיצ'רים (MVP)</a:t>
-            </a:r>
-          </a:p>
-        </p:txBody>
-      </p:sp>
-      <p:sp>
-        <p:nvSpPr>
-          <p:cNvPr id="3" name="TextBox 2"/>
-          <p:cNvSpPr txBox="1"/>
-          <p:nvPr/>
-        </p:nvSpPr>
-        <p:spPr>
-          <a:xfrm>
-            <a:off x="914400" y="731520"/>
-            <a:ext cx="10360152" cy="731520"/>
-          </a:xfrm>
-          <a:prstGeom prst="rect">
-            <a:avLst/>
-          </a:prstGeom>
-          <a:noFill/>
-        </p:spPr>
-        <p:txBody>
-          <a:bodyPr wrap="none">
-            <a:spAutoFit/>
-          </a:bodyPr>
-          <a:lstStyle/>
-          <a:p>
-            <a:pPr algn="r">
-              <a:defRPr sz="2800" b="1">
-                <a:solidFill>
-                  <a:srgbClr val="FFFFFF"/>
-                </a:solidFill>
-                <a:latin typeface="Arial"/>
-              </a:defRPr>
-            </a:pPr>
-            <a:r>
-              <a:t>טבלת תעדוף ואפיון פיצ'רים (MoSCoW)</a:t>
+              <a:t>טבלת תעדוף ואפיון פיצ'רים (MoSCoW) (חלק 6)</a:t>
             </a:r>
           </a:p>
         </p:txBody>
@@ -4895,7 +4862,7 @@
                         </a:defRPr>
                       </a:pPr>
                       <a:r>
-                        <a:t>התאמת שאלות ומניעת סרבול</a:t>
+                        <a:t>התאמת שאלות ומניעת סרבול ובלבול</a:t>
                       </a:r>
                     </a:p>
                   </a:txBody>
@@ -5017,7 +4984,7 @@
                         </a:defRPr>
                       </a:pPr>
                       <a:r>
-                        <a:t>מניעת הקלדה קשה בנייד</a:t>
+                        <a:t>מניעת הקלדה רפואית קשה בנייד</a:t>
                       </a:r>
                     </a:p>
                   </a:txBody>
@@ -5139,7 +5106,7 @@
                         </a:defRPr>
                       </a:pPr>
                       <a:r>
-                        <a:t>הסרת חשש משפטי ופיננסי</a:t>
+                        <a:t>הסרת חשש משפטי ופיננסי ('0 ש"ח')</a:t>
                       </a:r>
                     </a:p>
                   </a:txBody>
@@ -5261,7 +5228,7 @@
                         </a:defRPr>
                       </a:pPr>
                       <a:r>
-                        <a:t>ארגון מובנה וחיסכון בזמן</a:t>
+                        <a:t>ארגון מובנה, תיאום תורים וסנכרון Outlook</a:t>
                       </a:r>
                     </a:p>
                   </a:txBody>
@@ -5383,7 +5350,7 @@
                         </a:defRPr>
                       </a:pPr>
                       <a:r>
-                        <a:t>העלאת אישורים בקלות</a:t>
+                        <a:t>העלאת אישורים וצילומים בקלות</a:t>
                       </a:r>
                     </a:p>
                   </a:txBody>
@@ -5478,6 +5445,303 @@
 </p:sld>
 </file>
 
+<file path=ppt/slides/slide7.xml><?xml version="1.0" encoding="utf-8"?>
+<p:sld xmlns:a="http://schemas.openxmlformats.org/drawingml/2006/main" xmlns:p="http://schemas.openxmlformats.org/presentationml/2006/main" xmlns:r="http://schemas.openxmlformats.org/officeDocument/2006/relationships">
+  <p:cSld>
+    <p:bg>
+      <p:bgPr>
+        <a:solidFill>
+          <a:srgbClr val="0D0F17"/>
+        </a:solidFill>
+        <a:effectLst/>
+      </p:bgPr>
+    </p:bg>
+    <p:spTree>
+      <p:nvGrpSpPr>
+        <p:cNvPr id="1" name=""/>
+        <p:cNvGrpSpPr/>
+        <p:nvPr/>
+      </p:nvGrpSpPr>
+      <p:grpSpPr/>
+      <p:sp>
+        <p:nvSpPr>
+          <p:cNvPr id="2" name="TextBox 1"/>
+          <p:cNvSpPr txBox="1"/>
+          <p:nvPr/>
+        </p:nvSpPr>
+        <p:spPr>
+          <a:xfrm>
+            <a:off x="914400" y="365760"/>
+            <a:ext cx="10360152" cy="365760"/>
+          </a:xfrm>
+          <a:prstGeom prst="rect">
+            <a:avLst/>
+          </a:prstGeom>
+          <a:noFill/>
+        </p:spPr>
+        <p:txBody>
+          <a:bodyPr wrap="none">
+            <a:spAutoFit/>
+          </a:bodyPr>
+          <a:lstStyle/>
+          <a:p>
+            <a:pPr algn="r">
+              <a:defRPr sz="1200" b="1">
+                <a:solidFill>
+                  <a:srgbClr val="C5A880"/>
+                </a:solidFill>
+                <a:latin typeface="Arial"/>
+              </a:defRPr>
+            </a:pPr>
+            <a:r>
+              <a:t>חלק 7 וחלק 8: הפרוטוטייפ הפונקציונלי ודוח שמישות</a:t>
+            </a:r>
+          </a:p>
+        </p:txBody>
+      </p:sp>
+      <p:sp>
+        <p:nvSpPr>
+          <p:cNvPr id="3" name="TextBox 2"/>
+          <p:cNvSpPr txBox="1"/>
+          <p:nvPr/>
+        </p:nvSpPr>
+        <p:spPr>
+          <a:xfrm>
+            <a:off x="914400" y="731520"/>
+            <a:ext cx="10360152" cy="731520"/>
+          </a:xfrm>
+          <a:prstGeom prst="rect">
+            <a:avLst/>
+          </a:prstGeom>
+          <a:noFill/>
+        </p:spPr>
+        <p:txBody>
+          <a:bodyPr wrap="none">
+            <a:spAutoFit/>
+          </a:bodyPr>
+          <a:lstStyle/>
+          <a:p>
+            <a:pPr algn="r">
+              <a:defRPr sz="2800" b="1">
+                <a:solidFill>
+                  <a:srgbClr val="FFFFFF"/>
+                </a:solidFill>
+                <a:latin typeface="Arial"/>
+              </a:defRPr>
+            </a:pPr>
+            <a:r>
+              <a:t>הפרוטוטייפ הפעיל ודוח שמישות ומדידה (חלק 7-8)</a:t>
+            </a:r>
+          </a:p>
+        </p:txBody>
+      </p:sp>
+      <p:sp>
+        <p:nvSpPr>
+          <p:cNvPr id="4" name="TextBox 3"/>
+          <p:cNvSpPr txBox="1"/>
+          <p:nvPr/>
+        </p:nvSpPr>
+        <p:spPr>
+          <a:xfrm>
+            <a:off x="914400" y="1645920"/>
+            <a:ext cx="10360152" cy="4572000"/>
+          </a:xfrm>
+          <a:prstGeom prst="rect">
+            <a:avLst/>
+          </a:prstGeom>
+          <a:noFill/>
+        </p:spPr>
+        <p:txBody>
+          <a:bodyPr wrap="square">
+            <a:spAutoFit/>
+          </a:bodyPr>
+          <a:lstStyle/>
+          <a:p>
+            <a:pPr algn="r">
+              <a:spcAft>
+                <a:spcPts val="1000"/>
+              </a:spcAft>
+              <a:defRPr sz="1900" b="1">
+                <a:solidFill>
+                  <a:srgbClr val="FFFFFF"/>
+                </a:solidFill>
+                <a:latin typeface="Arial"/>
+              </a:defRPr>
+            </a:pPr>
+            <a:r>
+              <a:t>🔗 קישורים לפרוטוטייפ הפעיל:</a:t>
+            </a:r>
+          </a:p>
+          <a:p>
+            <a:pPr lvl="1" algn="r">
+              <a:spcAft>
+                <a:spcPts val="1000"/>
+              </a:spcAft>
+              <a:defRPr sz="1600">
+                <a:solidFill>
+                  <a:srgbClr val="A0AEC0"/>
+                </a:solidFill>
+                <a:latin typeface="Arial"/>
+              </a:defRPr>
+            </a:pPr>
+            <a:r>
+              <a:t>ממשק הלקוח וחיוג תורים: http://localhost:8000/client_intake.html</a:t>
+            </a:r>
+          </a:p>
+          <a:p>
+            <a:pPr lvl="1" algn="r">
+              <a:spcAft>
+                <a:spcPts val="1000"/>
+              </a:spcAft>
+              <a:defRPr sz="1600">
+                <a:solidFill>
+                  <a:srgbClr val="A0AEC0"/>
+                </a:solidFill>
+                <a:latin typeface="Arial"/>
+              </a:defRPr>
+            </a:pPr>
+            <a:r>
+              <a:t>לוח בקרה וניהול משרד עורך דין: http://localhost:8000/lawyer_dashboard.html</a:t>
+            </a:r>
+          </a:p>
+          <a:p>
+            <a:pPr algn="r">
+              <a:spcAft>
+                <a:spcPts val="1000"/>
+              </a:spcAft>
+              <a:defRPr sz="1900" b="1">
+                <a:solidFill>
+                  <a:srgbClr val="FFFFFF"/>
+                </a:solidFill>
+                <a:latin typeface="Arial"/>
+              </a:defRPr>
+            </a:pPr>
+            <a:r>
+              <a:t>📈 זרימת המשתמש בפרוטוטייפ (User Flow):</a:t>
+            </a:r>
+          </a:p>
+          <a:p>
+            <a:pPr lvl="1" algn="r">
+              <a:spcAft>
+                <a:spcPts val="1000"/>
+              </a:spcAft>
+              <a:defRPr sz="1600">
+                <a:solidFill>
+                  <a:srgbClr val="A0AEC0"/>
+                </a:solidFill>
+                <a:latin typeface="Arial"/>
+              </a:defRPr>
+            </a:pPr>
+            <a:r>
+              <a:t>בחירת שפה ומעבר לצ'אט -&gt; תיאור קולי של התאונה -&gt; בדיקת זכאות מיידית וזימון תור -&gt; קבלת המידע בזמן אמת בלוח ה-CRM של עורך הדין וסנכרון מיידי לתיבת ה-Outlook.</a:t>
+            </a:r>
+          </a:p>
+          <a:p>
+            <a:pPr algn="r">
+              <a:spcAft>
+                <a:spcPts val="1000"/>
+              </a:spcAft>
+              <a:defRPr sz="1900" b="1">
+                <a:solidFill>
+                  <a:srgbClr val="FFFFFF"/>
+                </a:solidFill>
+                <a:latin typeface="Arial"/>
+              </a:defRPr>
+            </a:pPr>
+            <a:r>
+              <a:t>📊 דוח שמישות ומדידה (Usability Report):</a:t>
+            </a:r>
+          </a:p>
+          <a:p>
+            <a:pPr lvl="1" algn="r">
+              <a:spcAft>
+                <a:spcPts val="1000"/>
+              </a:spcAft>
+              <a:defRPr sz="1600">
+                <a:solidFill>
+                  <a:srgbClr val="A0AEC0"/>
+                </a:solidFill>
+                <a:latin typeface="Arial"/>
+              </a:defRPr>
+            </a:pPr>
+            <a:r>
+              <a:t>2 סבבי בדיקות שמישות על 6 משתתפים שונים מקבוצת היעד ומחמיר אחד (עו"ד).</a:t>
+            </a:r>
+          </a:p>
+          <a:p>
+            <a:pPr lvl="1" algn="r">
+              <a:spcAft>
+                <a:spcPts val="1000"/>
+              </a:spcAft>
+              <a:defRPr sz="1600">
+                <a:solidFill>
+                  <a:srgbClr val="A0AEC0"/>
+                </a:solidFill>
+                <a:latin typeface="Arial"/>
+              </a:defRPr>
+            </a:pPr>
+            <a:r>
+              <a:t>שיפורים שבוצעו: דחיית טלפון לסוף והוספת שסתום ביטחון | לוקליזציה של לחצני האישור | שדרוג הקלטה קולית רציפה.</a:t>
+            </a:r>
+          </a:p>
+          <a:p>
+            <a:pPr algn="r">
+              <a:spcAft>
+                <a:spcPts val="1000"/>
+              </a:spcAft>
+              <a:defRPr sz="1900" b="1">
+                <a:solidFill>
+                  <a:srgbClr val="FFFFFF"/>
+                </a:solidFill>
+                <a:latin typeface="Arial"/>
+              </a:defRPr>
+            </a:pPr>
+            <a:r>
+              <a:t> השוואת מדדים כמותיים (סבב 1 מול סבב 2):</a:t>
+            </a:r>
+          </a:p>
+          <a:p>
+            <a:pPr lvl="1" algn="r">
+              <a:spcAft>
+                <a:spcPts val="1000"/>
+              </a:spcAft>
+              <a:defRPr sz="1600">
+                <a:solidFill>
+                  <a:srgbClr val="A0AEC0"/>
+                </a:solidFill>
+                <a:latin typeface="Arial"/>
+              </a:defRPr>
+            </a:pPr>
+            <a:r>
+              <a:t>שיעור השלמת שאלון (Completion Rate): עלה מ-60% ל-90% בזכות הבהרת העלויות וההקלטה הקולית.</a:t>
+            </a:r>
+          </a:p>
+          <a:p>
+            <a:pPr lvl="1" algn="r">
+              <a:spcAft>
+                <a:spcPts val="1000"/>
+              </a:spcAft>
+              <a:defRPr sz="1600">
+                <a:solidFill>
+                  <a:srgbClr val="A0AEC0"/>
+                </a:solidFill>
+                <a:latin typeface="Arial"/>
+              </a:defRPr>
+            </a:pPr>
+            <a:r>
+              <a:t>זמן ממוצע להשלמה (Time to Complete): ירד מ-5 דקות ל-2 דקות בלבד הודות לממשק הקולי היעיל.</a:t>
+            </a:r>
+          </a:p>
+        </p:txBody>
+      </p:sp>
+    </p:spTree>
+  </p:cSld>
+  <p:clrMapOvr>
+    <a:masterClrMapping/>
+  </p:clrMapOvr>
+</p:sld>
+</file>
+
 <file path=ppt/slides/slide8.xml><?xml version="1.0" encoding="utf-8"?>
 <p:sld xmlns:a="http://schemas.openxmlformats.org/drawingml/2006/main" xmlns:p="http://schemas.openxmlformats.org/presentationml/2006/main" xmlns:r="http://schemas.openxmlformats.org/officeDocument/2006/relationships">
   <p:cSld>
@@ -5527,7 +5791,7 @@
               </a:defRPr>
             </a:pPr>
             <a:r>
-              <a:t>חלק 7: הפרוטוטייפ הפונקציונלי</a:t>
+              <a:t>עבודה אישית ותובנות מהפרויקט</a:t>
             </a:r>
           </a:p>
         </p:txBody>
@@ -5563,7 +5827,7 @@
               </a:defRPr>
             </a:pPr>
             <a:r>
-              <a:t>זרימת המשתמש בפרוטוטייפ הפעיל (User Flow)</a:t>
+              <a:t>חלק 8: קשיים ותובנות אישיות בבניית המערכת</a:t>
             </a:r>
           </a:p>
         </p:txBody>
@@ -5592,9 +5856,9 @@
           <a:p>
             <a:pPr algn="r">
               <a:spcAft>
-                <a:spcPts val="1200"/>
-              </a:spcAft>
-              <a:defRPr sz="2000" b="1">
+                <a:spcPts val="1000"/>
+              </a:spcAft>
+              <a:defRPr sz="1900" b="1">
                 <a:solidFill>
                   <a:srgbClr val="FFFFFF"/>
                 </a:solidFill>
@@ -5602,13 +5866,29 @@
               </a:defRPr>
             </a:pPr>
             <a:r>
-              <a:t>קישורים לפרוטוטייפ הפעיל:</a:t>
+              <a:t>💡 קשיים טכנולוגיים ומוצריים שחוויתי במהלך הבנייה:</a:t>
+            </a:r>
+          </a:p>
+          <a:p>
+            <a:pPr algn="r">
+              <a:spcAft>
+                <a:spcPts val="1000"/>
+              </a:spcAft>
+              <a:defRPr sz="1900" b="1">
+                <a:solidFill>
+                  <a:srgbClr val="FFFFFF"/>
+                </a:solidFill>
+                <a:latin typeface="Arial"/>
+              </a:defRPr>
+            </a:pPr>
+            <a:r>
+              <a:t>  1. אינטגרציה דו-לשונית דינמית ומלאה:</a:t>
             </a:r>
           </a:p>
           <a:p>
             <a:pPr lvl="1" algn="r">
               <a:spcAft>
-                <a:spcPts val="1200"/>
+                <a:spcPts val="1000"/>
               </a:spcAft>
               <a:defRPr sz="1600">
                 <a:solidFill>
@@ -5618,13 +5898,29 @@
               </a:defRPr>
             </a:pPr>
             <a:r>
-              <a:t>פורטל המשתמש / אינטייק דיגיטלי: http://localhost:8000/client_intake.html</a:t>
+              <a:t>  התמודדות עם ממשק דו-כיווני (RTL/LTR) במכשירים ניידים שונים, ותרגום דינמי של כפתורי הבחירה כמו "OK" / "אישור" / "موافق" בהתאם לשפת הלקוח כדי למנוע ממנו להתבלבל או להתייאש.</a:t>
+            </a:r>
+          </a:p>
+          <a:p>
+            <a:pPr algn="r">
+              <a:spcAft>
+                <a:spcPts val="1000"/>
+              </a:spcAft>
+              <a:defRPr sz="1900" b="1">
+                <a:solidFill>
+                  <a:srgbClr val="FFFFFF"/>
+                </a:solidFill>
+                <a:latin typeface="Arial"/>
+              </a:defRPr>
+            </a:pPr>
+            <a:r>
+              <a:t>  2. שיפור מנוע הקלטת הקול והמרת הדיבור לטקסט (Web Speech API):</a:t>
             </a:r>
           </a:p>
           <a:p>
             <a:pPr lvl="1" algn="r">
               <a:spcAft>
-                <a:spcPts val="1200"/>
+                <a:spcPts val="1000"/>
               </a:spcAft>
               <a:defRPr sz="1600">
                 <a:solidFill>
@@ -5634,15 +5930,15 @@
               </a:defRPr>
             </a:pPr>
             <a:r>
-              <a:t>לוח הבקרה וניהול משרד עו"ד: http://localhost:8000/lawyer_dashboard.html</a:t>
+              <a:t>  תכנון ופיתוח מנגנון הקלטה רציף שיודע לשרשר את הדיבור של הלקוח ולמנוע מחיקת טקסט רפואי קודם כאשר הלקוח לוקח הפסקה קלה בדיבור במהלך תיאור הפציעה.</a:t>
             </a:r>
           </a:p>
           <a:p>
             <a:pPr algn="r">
               <a:spcAft>
-                <a:spcPts val="1200"/>
-              </a:spcAft>
-              <a:defRPr sz="2000" b="1">
+                <a:spcPts val="1000"/>
+              </a:spcAft>
+              <a:defRPr sz="1900" b="1">
                 <a:solidFill>
                   <a:srgbClr val="FFFFFF"/>
                 </a:solidFill>
@@ -5650,262 +5946,13 @@
               </a:defRPr>
             </a:pPr>
             <a:r>
-              <a:t>זרימת המשתמש במערכת (User Flow):</a:t>
-            </a:r>
-          </a:p>
-          <a:p>
-            <a:pPr algn="r">
-              <a:spcAft>
-                <a:spcPts val="1200"/>
-              </a:spcAft>
-              <a:defRPr sz="2000" b="0">
-                <a:solidFill>
-                  <a:srgbClr val="FFFFFF"/>
-                </a:solidFill>
-                <a:latin typeface="Arial"/>
-              </a:defRPr>
-            </a:pPr>
-            <a:r>
-              <a:t>  1. המשתמש בוחר שפה (ערבית/עברית) ועובר לצ'אט-בוט אינטראקטיבי.</a:t>
-            </a:r>
-          </a:p>
-          <a:p>
-            <a:pPr algn="r">
-              <a:spcAft>
-                <a:spcPts val="1200"/>
-              </a:spcAft>
-              <a:defRPr sz="2000" b="0">
-                <a:solidFill>
-                  <a:srgbClr val="FFFFFF"/>
-                </a:solidFill>
-                <a:latin typeface="Arial"/>
-              </a:defRPr>
-            </a:pPr>
-            <a:r>
-              <a:t>  2. ניתוב דינמי של השאלות בהתאם לסוג הפגיעה (מדלג על שאלות מיותרות).</a:t>
-            </a:r>
-          </a:p>
-          <a:p>
-            <a:pPr algn="r">
-              <a:spcAft>
-                <a:spcPts val="1200"/>
-              </a:spcAft>
-              <a:defRPr sz="2000" b="0">
-                <a:solidFill>
-                  <a:srgbClr val="FFFFFF"/>
-                </a:solidFill>
-                <a:latin typeface="Arial"/>
-              </a:defRPr>
-            </a:pPr>
-            <a:r>
-              <a:t>  3. המשתמש מזין את נסיבות התאונה בהקלטה קולית בשפתו (Web Speech API).</a:t>
-            </a:r>
-          </a:p>
-          <a:p>
-            <a:pPr algn="r">
-              <a:spcAft>
-                <a:spcPts val="1200"/>
-              </a:spcAft>
-              <a:defRPr sz="2000" b="0">
-                <a:solidFill>
-                  <a:srgbClr val="FFFFFF"/>
-                </a:solidFill>
-                <a:latin typeface="Arial"/>
-              </a:defRPr>
-            </a:pPr>
-            <a:r>
-              <a:t>  4. מוצגת הערכת זכאות חינמית מלווה בשסתום ביטחון (הבהרת תנאי 0 ש"ח מראש).</a:t>
-            </a:r>
-          </a:p>
-          <a:p>
-            <a:pPr algn="r">
-              <a:spcAft>
-                <a:spcPts val="1200"/>
-              </a:spcAft>
-              <a:defRPr sz="2000" b="0">
-                <a:solidFill>
-                  <a:srgbClr val="FFFFFF"/>
-                </a:solidFill>
-                <a:latin typeface="Arial"/>
-              </a:defRPr>
-            </a:pPr>
-            <a:r>
-              <a:t>  5. שליחת המידע ישירות ללוח הבקרה של עורך הדין עם סנכרון לפורטל Outlook המובנה.</a:t>
-            </a:r>
-          </a:p>
-          <a:p>
-            <a:pPr algn="r">
-              <a:spcAft>
-                <a:spcPts val="1200"/>
-              </a:spcAft>
-              <a:defRPr sz="2000" b="1">
-                <a:solidFill>
-                  <a:srgbClr val="FFFFFF"/>
-                </a:solidFill>
-                <a:latin typeface="Arial"/>
-              </a:defRPr>
-            </a:pPr>
-            <a:r>
-              <a:t>התפתחות המוצר: מעבר מ-Wireframes בסיסיים לממשק קולי משופר ולוח ניהול מלא התומך במעברי שפות דינמיים.</a:t>
-            </a:r>
-          </a:p>
-        </p:txBody>
-      </p:sp>
-    </p:spTree>
-  </p:cSld>
-  <p:clrMapOvr>
-    <a:masterClrMapping/>
-  </p:clrMapOvr>
-</p:sld>
-</file>
-
-<file path=ppt/slides/slide9.xml><?xml version="1.0" encoding="utf-8"?>
-<p:sld xmlns:a="http://schemas.openxmlformats.org/drawingml/2006/main" xmlns:p="http://schemas.openxmlformats.org/presentationml/2006/main" xmlns:r="http://schemas.openxmlformats.org/officeDocument/2006/relationships">
-  <p:cSld>
-    <p:bg>
-      <p:bgPr>
-        <a:solidFill>
-          <a:srgbClr val="0D0F17"/>
-        </a:solidFill>
-        <a:effectLst/>
-      </p:bgPr>
-    </p:bg>
-    <p:spTree>
-      <p:nvGrpSpPr>
-        <p:cNvPr id="1" name=""/>
-        <p:cNvGrpSpPr/>
-        <p:nvPr/>
-      </p:nvGrpSpPr>
-      <p:grpSpPr/>
-      <p:sp>
-        <p:nvSpPr>
-          <p:cNvPr id="2" name="TextBox 1"/>
-          <p:cNvSpPr txBox="1"/>
-          <p:nvPr/>
-        </p:nvSpPr>
-        <p:spPr>
-          <a:xfrm>
-            <a:off x="914400" y="365760"/>
-            <a:ext cx="10360152" cy="365760"/>
-          </a:xfrm>
-          <a:prstGeom prst="rect">
-            <a:avLst/>
-          </a:prstGeom>
-          <a:noFill/>
-        </p:spPr>
-        <p:txBody>
-          <a:bodyPr wrap="none">
-            <a:spAutoFit/>
-          </a:bodyPr>
-          <a:lstStyle/>
-          <a:p>
-            <a:pPr algn="r">
-              <a:defRPr sz="1200" b="1">
-                <a:solidFill>
-                  <a:srgbClr val="C5A880"/>
-                </a:solidFill>
-                <a:latin typeface="Arial"/>
-              </a:defRPr>
-            </a:pPr>
-            <a:r>
-              <a:t>חלק 8: דוח שמישות ומדידה</a:t>
-            </a:r>
-          </a:p>
-        </p:txBody>
-      </p:sp>
-      <p:sp>
-        <p:nvSpPr>
-          <p:cNvPr id="3" name="TextBox 2"/>
-          <p:cNvSpPr txBox="1"/>
-          <p:nvPr/>
-        </p:nvSpPr>
-        <p:spPr>
-          <a:xfrm>
-            <a:off x="914400" y="731520"/>
-            <a:ext cx="10360152" cy="731520"/>
-          </a:xfrm>
-          <a:prstGeom prst="rect">
-            <a:avLst/>
-          </a:prstGeom>
-          <a:noFill/>
-        </p:spPr>
-        <p:txBody>
-          <a:bodyPr wrap="none">
-            <a:spAutoFit/>
-          </a:bodyPr>
-          <a:lstStyle/>
-          <a:p>
-            <a:pPr algn="r">
-              <a:defRPr sz="2800" b="1">
-                <a:solidFill>
-                  <a:srgbClr val="FFFFFF"/>
-                </a:solidFill>
-                <a:latin typeface="Arial"/>
-              </a:defRPr>
-            </a:pPr>
-            <a:r>
-              <a:t>תוצאות סבב הבדיקות והשוואת מדדים כמותיים</a:t>
-            </a:r>
-          </a:p>
-        </p:txBody>
-      </p:sp>
-      <p:sp>
-        <p:nvSpPr>
-          <p:cNvPr id="4" name="TextBox 3"/>
-          <p:cNvSpPr txBox="1"/>
-          <p:nvPr/>
-        </p:nvSpPr>
-        <p:spPr>
-          <a:xfrm>
-            <a:off x="914400" y="1645920"/>
-            <a:ext cx="10360152" cy="4572000"/>
-          </a:xfrm>
-          <a:prstGeom prst="rect">
-            <a:avLst/>
-          </a:prstGeom>
-          <a:noFill/>
-        </p:spPr>
-        <p:txBody>
-          <a:bodyPr wrap="square">
-            <a:spAutoFit/>
-          </a:bodyPr>
-          <a:lstStyle/>
-          <a:p>
-            <a:pPr algn="r">
-              <a:spcAft>
-                <a:spcPts val="1200"/>
-              </a:spcAft>
-              <a:defRPr sz="2000" b="1">
-                <a:solidFill>
-                  <a:srgbClr val="FFFFFF"/>
-                </a:solidFill>
-                <a:latin typeface="Arial"/>
-              </a:defRPr>
-            </a:pPr>
-            <a:r>
-              <a:t>מתודולוגיית הבדיקה: 2 סבבי בדיקות שמישות (Moderated) על 6 משתתפים שונים מקבוצת היעד + עורך דין.</a:t>
-            </a:r>
-          </a:p>
-          <a:p>
-            <a:pPr algn="r">
-              <a:spcAft>
-                <a:spcPts val="1200"/>
-              </a:spcAft>
-              <a:defRPr sz="2000" b="1">
-                <a:solidFill>
-                  <a:srgbClr val="FFFFFF"/>
-                </a:solidFill>
-                <a:latin typeface="Arial"/>
-              </a:defRPr>
-            </a:pPr>
-            <a:r>
-              <a:t>שיפורים שבוצעו בעקבות סבב הבדיקות הראשון:</a:t>
+              <a:t>  3. פתרון מגבלות האבטחה באינטגרציית Microsoft Outlook:</a:t>
             </a:r>
           </a:p>
           <a:p>
             <a:pPr lvl="1" algn="r">
               <a:spcAft>
-                <a:spcPts val="1200"/>
+                <a:spcPts val="1000"/>
               </a:spcAft>
               <a:defRPr sz="1600">
                 <a:solidFill>
@@ -5915,135 +5962,7 @@
               </a:defRPr>
             </a:pPr>
             <a:r>
-              <a:t>פתרון נטישת הטלפון: הצגת שסתום ביטחון מפורט ('0 ש"ח עלות') לפני בקשת פרטי הקשר בסיום.</a:t>
-            </a:r>
-          </a:p>
-          <a:p>
-            <a:pPr lvl="1" algn="r">
-              <a:spcAft>
-                <a:spcPts val="1200"/>
-              </a:spcAft>
-              <a:defRPr sz="1600">
-                <a:solidFill>
-                  <a:srgbClr val="A0AEC0"/>
-                </a:solidFill>
-                <a:latin typeface="Arial"/>
-              </a:defRPr>
-            </a:pPr>
-            <a:r>
-              <a:t>תיקון לוקליזציה: כפתור האישור ('OK') מתורגם כעת אוטומטית בכל מעבר שפות בהתאם לממשק.</a:t>
-            </a:r>
-          </a:p>
-          <a:p>
-            <a:pPr lvl="1" algn="r">
-              <a:spcAft>
-                <a:spcPts val="1200"/>
-              </a:spcAft>
-              <a:defRPr sz="1600">
-                <a:solidFill>
-                  <a:srgbClr val="A0AEC0"/>
-                </a:solidFill>
-                <a:latin typeface="Arial"/>
-              </a:defRPr>
-            </a:pPr>
-            <a:r>
-              <a:t>שדרוג תמלול קולי: מעבר ללולאת תמלול רציפה שמונעת מחיקת טקסט בעת הפסקות דיבור קצרות.</a:t>
-            </a:r>
-          </a:p>
-          <a:p>
-            <a:pPr algn="r">
-              <a:spcAft>
-                <a:spcPts val="1200"/>
-              </a:spcAft>
-              <a:defRPr sz="2000" b="1">
-                <a:solidFill>
-                  <a:srgbClr val="FFFFFF"/>
-                </a:solidFill>
-                <a:latin typeface="Arial"/>
-              </a:defRPr>
-            </a:pPr>
-            <a:r>
-              <a:t>השוואת מדדים כמותיים (סבב 1 מול סבב 2):</a:t>
-            </a:r>
-          </a:p>
-          <a:p>
-            <a:pPr lvl="1" algn="r">
-              <a:spcAft>
-                <a:spcPts val="1200"/>
-              </a:spcAft>
-              <a:defRPr sz="1600">
-                <a:solidFill>
-                  <a:srgbClr val="A0AEC0"/>
-                </a:solidFill>
-                <a:latin typeface="Arial"/>
-              </a:defRPr>
-            </a:pPr>
-            <a:r>
-              <a:t>שיעור השלמת שאלון (Completion Rate): עלה מ-60% (סבב 1) ל-90% (סבב 2) בזכות מסך הביטחון.</a:t>
-            </a:r>
-          </a:p>
-          <a:p>
-            <a:pPr lvl="1" algn="r">
-              <a:spcAft>
-                <a:spcPts val="1200"/>
-              </a:spcAft>
-              <a:defRPr sz="1600">
-                <a:solidFill>
-                  <a:srgbClr val="A0AEC0"/>
-                </a:solidFill>
-                <a:latin typeface="Arial"/>
-              </a:defRPr>
-            </a:pPr>
-            <a:r>
-              <a:t>זמן ממוצע להשלמה (Time to Complete): ירד מ-5 דקות ל-2 דקות בלבד הודות לממשק הקולי המשופר.</a:t>
-            </a:r>
-          </a:p>
-          <a:p>
-            <a:pPr algn="r">
-              <a:spcAft>
-                <a:spcPts val="1200"/>
-              </a:spcAft>
-              <a:defRPr sz="2000" b="1">
-                <a:solidFill>
-                  <a:srgbClr val="FFFFFF"/>
-                </a:solidFill>
-                <a:latin typeface="Arial"/>
-              </a:defRPr>
-            </a:pPr>
-            <a:r>
-              <a:t>המלצות לגרסה הבאה (Next Steps):</a:t>
-            </a:r>
-          </a:p>
-          <a:p>
-            <a:pPr algn="r">
-              <a:spcAft>
-                <a:spcPts val="1200"/>
-              </a:spcAft>
-              <a:defRPr sz="2000" b="0">
-                <a:solidFill>
-                  <a:srgbClr val="FFFFFF"/>
-                </a:solidFill>
-                <a:latin typeface="Arial"/>
-              </a:defRPr>
-            </a:pPr>
-            <a:r>
-              <a:t>  1. מעבר לבוט מבוסס WhatsApp Business API להנגשה מקסימלית ללא צורך בכניסה לאתר.</a:t>
-            </a:r>
-          </a:p>
-          <a:p>
-            <a:pPr algn="r">
-              <a:spcAft>
-                <a:spcPts val="1200"/>
-              </a:spcAft>
-              <a:defRPr sz="2000" b="0">
-                <a:solidFill>
-                  <a:srgbClr val="FFFFFF"/>
-                </a:solidFill>
-                <a:latin typeface="Arial"/>
-              </a:defRPr>
-            </a:pPr>
-            <a:r>
-              <a:t>  2. מנוע AI לניתוח וסיווג אוטומטי של תמלול קול הלקוח לצורך קישורו לסעיפי נכות של ביטוח לאומי.</a:t>
+              <a:t>  הדפדפנים המודרניים מונעים טעינה של מערכות מיקרוסופט ישירות בתוך Iframe עקב מגבלות אבטחה. פתרנו זאת על ידי פיתוח של מנגנון ייחודי בצד הלקוח הפותח חלונות נפרדים ומאובטחים העושים שימוש ב-SSO ובעוגיות הדפדפן הקיימות כדי לחבר את עורך הדין אוטומטית לחשבון שלו ללא צורך בהקשת סיסמה מחדש.</a:t>
             </a:r>
           </a:p>
         </p:txBody>
